--- a/wwwroot/15-FivePlatformsofMVCArchitectureModel.pptx
+++ b/wwwroot/15-FivePlatformsofMVCArchitectureModel.pptx
@@ -239,7 +239,7 @@
           <a:p>
             <a:fld id="{0F9B84EA-7D68-4D60-9CB1-D50884785D1C}" type="datetimeFigureOut">
               <a:rPr lang="zh-CN" altLang="en-US" smtClean="0"/>
-              <a:t>2023/3/11</a:t>
+              <a:t>2023/3/18</a:t>
             </a:fld>
             <a:endParaRPr lang="zh-CN" altLang="en-US"/>
           </a:p>
@@ -404,7 +404,7 @@
           <a:p>
             <a:fld id="{D2A48B96-639E-45A3-A0BA-2464DFDB1FAA}" type="datetimeFigureOut">
               <a:rPr lang="zh-CN" altLang="en-US" smtClean="0"/>
-              <a:t>2023/3/11</a:t>
+              <a:t>2023/3/18</a:t>
             </a:fld>
             <a:endParaRPr lang="zh-CN" altLang="en-US"/>
           </a:p>
@@ -809,7 +809,43 @@
             </a:r>
             <a:r>
               <a:rPr lang="zh-CN" altLang="en-US" dirty="0" smtClean="0"/>
-              <a:t>分钟</a:t>
+              <a:t>分钟。视图</a:t>
+            </a:r>
+            <a:r>
+              <a:rPr lang="en-US" altLang="zh-CN" dirty="0" smtClean="0"/>
+              <a:t>V</a:t>
+            </a:r>
+            <a:r>
+              <a:rPr lang="zh-CN" altLang="en-US" dirty="0" smtClean="0"/>
+              <a:t>：如上。控制</a:t>
+            </a:r>
+            <a:r>
+              <a:rPr lang="en-US" altLang="zh-CN" dirty="0" smtClean="0"/>
+              <a:t>C</a:t>
+            </a:r>
+            <a:r>
+              <a:rPr lang="zh-CN" altLang="en-US" dirty="0" smtClean="0"/>
+              <a:t>：一对多。模型</a:t>
+            </a:r>
+            <a:r>
+              <a:rPr lang="en-US" altLang="zh-CN" dirty="0" smtClean="0"/>
+              <a:t>M</a:t>
+            </a:r>
+            <a:r>
+              <a:rPr lang="zh-CN" altLang="en-US" dirty="0" smtClean="0"/>
+              <a:t>：人文</a:t>
+            </a:r>
+            <a:r>
+              <a:rPr lang="en-US" dirty="0" smtClean="0"/>
+              <a:t>(</a:t>
+            </a:r>
+            <a:r>
+              <a:rPr lang="zh-CN" altLang="en-US" dirty="0" smtClean="0"/>
+              <a:t>情感交流</a:t>
+            </a:r>
+            <a:r>
+              <a:rPr lang="en-US" dirty="0" smtClean="0"/>
+              <a:t>) </a:t>
             </a:r>
             <a:endParaRPr lang="zh-CN" altLang="en-US" dirty="0"/>
           </a:p>
@@ -991,6 +1027,23 @@
           <a:bodyPr/>
           <a:lstStyle/>
           <a:p>
+            <a:pPr marL="0" marR="0" lvl="0" indent="0" algn="l" defTabSz="685800" rtl="0" eaLnBrk="1" fontAlgn="auto" latinLnBrk="0" hangingPunct="1">
+              <a:lnSpc>
+                <a:spcPct val="100000"/>
+              </a:lnSpc>
+              <a:spcBef>
+                <a:spcPts val="0"/>
+              </a:spcBef>
+              <a:spcAft>
+                <a:spcPts val="0"/>
+              </a:spcAft>
+              <a:buClrTx/>
+              <a:buSzTx/>
+              <a:buFontTx/>
+              <a:buNone/>
+              <a:tabLst/>
+              <a:defRPr/>
+            </a:pPr>
             <a:r>
               <a:rPr lang="zh-CN" altLang="en-US" dirty="0" smtClean="0"/>
               <a:t>第</a:t>
@@ -1001,8 +1054,47 @@
             </a:r>
             <a:r>
               <a:rPr lang="zh-CN" altLang="en-US" dirty="0" smtClean="0"/>
-              <a:t>分钟</a:t>
-            </a:r>
+              <a:t>分钟。视图</a:t>
+            </a:r>
+            <a:r>
+              <a:rPr lang="en-US" altLang="zh-CN" dirty="0" smtClean="0"/>
+              <a:t>V</a:t>
+            </a:r>
+            <a:r>
+              <a:rPr lang="zh-CN" altLang="en-US" dirty="0" smtClean="0"/>
+              <a:t>：如上。控制</a:t>
+            </a:r>
+            <a:r>
+              <a:rPr lang="en-US" altLang="zh-CN" dirty="0" smtClean="0"/>
+              <a:t>C</a:t>
+            </a:r>
+            <a:r>
+              <a:rPr lang="zh-CN" altLang="en-US" dirty="0" smtClean="0"/>
+              <a:t>：一对多。模型</a:t>
+            </a:r>
+            <a:r>
+              <a:rPr lang="en-US" altLang="zh-CN" dirty="0" smtClean="0"/>
+              <a:t>M</a:t>
+            </a:r>
+            <a:r>
+              <a:rPr lang="zh-CN" altLang="en-US" dirty="0" smtClean="0"/>
+              <a:t>：科学</a:t>
+            </a:r>
+            <a:r>
+              <a:rPr lang="en-US" dirty="0" smtClean="0"/>
+              <a:t>(</a:t>
+            </a:r>
+            <a:r>
+              <a:rPr lang="zh-CN" altLang="en-US" dirty="0" smtClean="0"/>
+              <a:t>规律探究</a:t>
+            </a:r>
+            <a:r>
+              <a:rPr lang="en-US" dirty="0" smtClean="0"/>
+              <a:t>) </a:t>
+            </a:r>
+            <a:endParaRPr lang="zh-CN" altLang="en-US" dirty="0" smtClean="0"/>
+          </a:p>
+          <a:p>
             <a:endParaRPr lang="zh-CN" altLang="en-US" dirty="0"/>
           </a:p>
         </p:txBody>
@@ -1087,6 +1179,23 @@
           <a:bodyPr/>
           <a:lstStyle/>
           <a:p>
+            <a:pPr marL="0" marR="0" lvl="0" indent="0" algn="l" defTabSz="685800" rtl="0" eaLnBrk="1" fontAlgn="auto" latinLnBrk="0" hangingPunct="1">
+              <a:lnSpc>
+                <a:spcPct val="100000"/>
+              </a:lnSpc>
+              <a:spcBef>
+                <a:spcPts val="0"/>
+              </a:spcBef>
+              <a:spcAft>
+                <a:spcPts val="0"/>
+              </a:spcAft>
+              <a:buClrTx/>
+              <a:buSzTx/>
+              <a:buFontTx/>
+              <a:buNone/>
+              <a:tabLst/>
+              <a:defRPr/>
+            </a:pPr>
             <a:r>
               <a:rPr lang="zh-CN" altLang="en-US" dirty="0" smtClean="0"/>
               <a:t>第</a:t>
@@ -1097,7 +1206,43 @@
             </a:r>
             <a:r>
               <a:rPr lang="zh-CN" altLang="en-US" dirty="0" smtClean="0"/>
-              <a:t>分钟</a:t>
+              <a:t>分钟。视图</a:t>
+            </a:r>
+            <a:r>
+              <a:rPr lang="en-US" altLang="zh-CN" dirty="0" smtClean="0"/>
+              <a:t>V</a:t>
+            </a:r>
+            <a:r>
+              <a:rPr lang="zh-CN" altLang="en-US" dirty="0" smtClean="0"/>
+              <a:t>：如上。控制</a:t>
+            </a:r>
+            <a:r>
+              <a:rPr lang="en-US" altLang="zh-CN" dirty="0" smtClean="0"/>
+              <a:t>C</a:t>
+            </a:r>
+            <a:r>
+              <a:rPr lang="zh-CN" altLang="en-US" dirty="0" smtClean="0"/>
+              <a:t>：一对多。模型</a:t>
+            </a:r>
+            <a:r>
+              <a:rPr lang="en-US" altLang="zh-CN" dirty="0" smtClean="0"/>
+              <a:t>M</a:t>
+            </a:r>
+            <a:r>
+              <a:rPr lang="zh-CN" altLang="en-US" dirty="0" smtClean="0"/>
+              <a:t>：技术</a:t>
+            </a:r>
+            <a:r>
+              <a:rPr lang="en-US" dirty="0" smtClean="0"/>
+              <a:t>(</a:t>
+            </a:r>
+            <a:r>
+              <a:rPr lang="zh-CN" altLang="en-US" dirty="0" smtClean="0"/>
+              <a:t>信息运用</a:t>
+            </a:r>
+            <a:r>
+              <a:rPr lang="en-US" dirty="0" smtClean="0"/>
+              <a:t>) </a:t>
             </a:r>
             <a:endParaRPr lang="zh-CN" altLang="en-US" dirty="0"/>
           </a:p>
@@ -1183,6 +1328,23 @@
           <a:bodyPr/>
           <a:lstStyle/>
           <a:p>
+            <a:pPr marL="0" marR="0" lvl="0" indent="0" algn="l" defTabSz="685800" rtl="0" eaLnBrk="1" fontAlgn="auto" latinLnBrk="0" hangingPunct="1">
+              <a:lnSpc>
+                <a:spcPct val="100000"/>
+              </a:lnSpc>
+              <a:spcBef>
+                <a:spcPts val="0"/>
+              </a:spcBef>
+              <a:spcAft>
+                <a:spcPts val="0"/>
+              </a:spcAft>
+              <a:buClrTx/>
+              <a:buSzTx/>
+              <a:buFontTx/>
+              <a:buNone/>
+              <a:tabLst/>
+              <a:defRPr/>
+            </a:pPr>
             <a:r>
               <a:rPr lang="zh-CN" altLang="en-US" dirty="0" smtClean="0"/>
               <a:t>第</a:t>
@@ -1193,7 +1355,43 @@
             </a:r>
             <a:r>
               <a:rPr lang="zh-CN" altLang="en-US" dirty="0" smtClean="0"/>
-              <a:t>分钟</a:t>
+              <a:t>分钟。视图</a:t>
+            </a:r>
+            <a:r>
+              <a:rPr lang="en-US" altLang="zh-CN" dirty="0" smtClean="0"/>
+              <a:t>V</a:t>
+            </a:r>
+            <a:r>
+              <a:rPr lang="zh-CN" altLang="en-US" dirty="0" smtClean="0"/>
+              <a:t>：如上。控制</a:t>
+            </a:r>
+            <a:r>
+              <a:rPr lang="en-US" altLang="zh-CN" dirty="0" smtClean="0"/>
+              <a:t>C</a:t>
+            </a:r>
+            <a:r>
+              <a:rPr lang="zh-CN" altLang="en-US" dirty="0" smtClean="0"/>
+              <a:t>：一对多。模型</a:t>
+            </a:r>
+            <a:r>
+              <a:rPr lang="en-US" altLang="zh-CN" dirty="0" smtClean="0"/>
+              <a:t>M</a:t>
+            </a:r>
+            <a:r>
+              <a:rPr lang="zh-CN" altLang="en-US" dirty="0" smtClean="0"/>
+              <a:t>：人文</a:t>
+            </a:r>
+            <a:r>
+              <a:rPr lang="en-US" dirty="0" smtClean="0"/>
+              <a:t>(</a:t>
+            </a:r>
+            <a:r>
+              <a:rPr lang="zh-CN" altLang="en-US" dirty="0" smtClean="0"/>
+              <a:t>情感交流</a:t>
+            </a:r>
+            <a:r>
+              <a:rPr lang="en-US" dirty="0" smtClean="0"/>
+              <a:t>) </a:t>
             </a:r>
             <a:endParaRPr lang="zh-CN" altLang="en-US" dirty="0"/>
           </a:p>
@@ -1279,6 +1477,23 @@
           <a:bodyPr/>
           <a:lstStyle/>
           <a:p>
+            <a:pPr marL="0" marR="0" lvl="0" indent="0" algn="l" defTabSz="685800" rtl="0" eaLnBrk="1" fontAlgn="auto" latinLnBrk="0" hangingPunct="1">
+              <a:lnSpc>
+                <a:spcPct val="100000"/>
+              </a:lnSpc>
+              <a:spcBef>
+                <a:spcPts val="0"/>
+              </a:spcBef>
+              <a:spcAft>
+                <a:spcPts val="0"/>
+              </a:spcAft>
+              <a:buClrTx/>
+              <a:buSzTx/>
+              <a:buFontTx/>
+              <a:buNone/>
+              <a:tabLst/>
+              <a:defRPr/>
+            </a:pPr>
             <a:r>
               <a:rPr lang="zh-CN" altLang="en-US" dirty="0" smtClean="0"/>
               <a:t>第</a:t>
@@ -1289,7 +1504,43 @@
             </a:r>
             <a:r>
               <a:rPr lang="zh-CN" altLang="en-US" dirty="0" smtClean="0"/>
-              <a:t>分钟</a:t>
+              <a:t>分钟。视图</a:t>
+            </a:r>
+            <a:r>
+              <a:rPr lang="en-US" altLang="zh-CN" dirty="0" smtClean="0"/>
+              <a:t>V</a:t>
+            </a:r>
+            <a:r>
+              <a:rPr lang="zh-CN" altLang="en-US" dirty="0" smtClean="0"/>
+              <a:t>：如上。控制</a:t>
+            </a:r>
+            <a:r>
+              <a:rPr lang="en-US" altLang="zh-CN" dirty="0" smtClean="0"/>
+              <a:t>C</a:t>
+            </a:r>
+            <a:r>
+              <a:rPr lang="zh-CN" altLang="en-US" dirty="0" smtClean="0"/>
+              <a:t>：一对多。模型</a:t>
+            </a:r>
+            <a:r>
+              <a:rPr lang="en-US" altLang="zh-CN" dirty="0" smtClean="0"/>
+              <a:t>M</a:t>
+            </a:r>
+            <a:r>
+              <a:rPr lang="zh-CN" altLang="en-US" dirty="0" smtClean="0"/>
+              <a:t>：哲学</a:t>
+            </a:r>
+            <a:r>
+              <a:rPr lang="en-US" dirty="0" smtClean="0"/>
+              <a:t>(</a:t>
+            </a:r>
+            <a:r>
+              <a:rPr lang="zh-CN" altLang="en-US" dirty="0" smtClean="0"/>
+              <a:t>智能建构</a:t>
+            </a:r>
+            <a:r>
+              <a:rPr lang="en-US" dirty="0" smtClean="0"/>
+              <a:t>) </a:t>
             </a:r>
             <a:endParaRPr lang="zh-CN" altLang="en-US" dirty="0"/>
           </a:p>
@@ -1375,6 +1626,23 @@
           <a:bodyPr/>
           <a:lstStyle/>
           <a:p>
+            <a:pPr marL="0" marR="0" lvl="0" indent="0" algn="l" defTabSz="685800" rtl="0" eaLnBrk="1" fontAlgn="auto" latinLnBrk="0" hangingPunct="1">
+              <a:lnSpc>
+                <a:spcPct val="100000"/>
+              </a:lnSpc>
+              <a:spcBef>
+                <a:spcPts val="0"/>
+              </a:spcBef>
+              <a:spcAft>
+                <a:spcPts val="0"/>
+              </a:spcAft>
+              <a:buClrTx/>
+              <a:buSzTx/>
+              <a:buFontTx/>
+              <a:buNone/>
+              <a:tabLst/>
+              <a:defRPr/>
+            </a:pPr>
             <a:r>
               <a:rPr lang="zh-CN" altLang="en-US" dirty="0" smtClean="0"/>
               <a:t>第</a:t>
@@ -1393,9 +1661,45 @@
             </a:r>
             <a:r>
               <a:rPr lang="zh-CN" altLang="en-US" dirty="0" smtClean="0"/>
-              <a:t>分钟</a:t>
-            </a:r>
-            <a:endParaRPr lang="zh-CN" altLang="en-US" dirty="0"/>
+              <a:t>分钟。视图</a:t>
+            </a:r>
+            <a:r>
+              <a:rPr lang="en-US" altLang="zh-CN" dirty="0" smtClean="0"/>
+              <a:t>V</a:t>
+            </a:r>
+            <a:r>
+              <a:rPr lang="zh-CN" altLang="en-US" dirty="0" smtClean="0"/>
+              <a:t>：如上。控制</a:t>
+            </a:r>
+            <a:r>
+              <a:rPr lang="en-US" altLang="zh-CN" dirty="0" smtClean="0"/>
+              <a:t>C</a:t>
+            </a:r>
+            <a:r>
+              <a:rPr lang="zh-CN" altLang="en-US" dirty="0" smtClean="0"/>
+              <a:t>：一对一提问与回答、辅助一对多讲解。模型</a:t>
+            </a:r>
+            <a:r>
+              <a:rPr lang="en-US" altLang="zh-CN" dirty="0" smtClean="0"/>
+              <a:t>M</a:t>
+            </a:r>
+            <a:r>
+              <a:rPr lang="zh-CN" altLang="en-US" dirty="0" smtClean="0"/>
+              <a:t>：实践</a:t>
+            </a:r>
+            <a:r>
+              <a:rPr lang="en-US" dirty="0" smtClean="0"/>
+              <a:t>(</a:t>
+            </a:r>
+            <a:r>
+              <a:rPr lang="zh-CN" altLang="en-US" dirty="0" smtClean="0"/>
+              <a:t>数据读写</a:t>
+            </a:r>
+            <a:r>
+              <a:rPr lang="en-US" smtClean="0"/>
+              <a:t>) </a:t>
+            </a:r>
+            <a:endParaRPr lang="zh-CN" altLang="en-US" smtClean="0"/>
           </a:p>
         </p:txBody>
       </p:sp>
@@ -1648,7 +1952,7 @@
           <a:p>
             <a:fld id="{82F288E0-7875-42C4-84C8-98DBBD3BF4D2}" type="datetimeFigureOut">
               <a:rPr lang="zh-CN" altLang="en-US" smtClean="0"/>
-              <a:t>2023/3/11</a:t>
+              <a:t>2023/3/18</a:t>
             </a:fld>
             <a:endParaRPr lang="zh-CN" altLang="en-US"/>
           </a:p>
@@ -1806,7 +2110,7 @@
           <a:p>
             <a:fld id="{82F288E0-7875-42C4-84C8-98DBBD3BF4D2}" type="datetimeFigureOut">
               <a:rPr lang="zh-CN" altLang="en-US" smtClean="0"/>
-              <a:t>2023/3/11</a:t>
+              <a:t>2023/3/18</a:t>
             </a:fld>
             <a:endParaRPr lang="zh-CN" altLang="en-US"/>
           </a:p>
@@ -2145,7 +2449,7 @@
           <a:p>
             <a:fld id="{82F288E0-7875-42C4-84C8-98DBBD3BF4D2}" type="datetimeFigureOut">
               <a:rPr lang="zh-CN" altLang="en-US" smtClean="0"/>
-              <a:t>2023/3/11</a:t>
+              <a:t>2023/3/18</a:t>
             </a:fld>
             <a:endParaRPr lang="zh-CN" altLang="en-US"/>
           </a:p>
@@ -2381,7 +2685,7 @@
           <a:p>
             <a:fld id="{82F288E0-7875-42C4-84C8-98DBBD3BF4D2}" type="datetimeFigureOut">
               <a:rPr lang="zh-CN" altLang="en-US" smtClean="0"/>
-              <a:t>2023/3/11</a:t>
+              <a:t>2023/3/18</a:t>
             </a:fld>
             <a:endParaRPr lang="zh-CN" altLang="en-US"/>
           </a:p>
@@ -2752,7 +3056,7 @@
           <a:p>
             <a:fld id="{82F288E0-7875-42C4-84C8-98DBBD3BF4D2}" type="datetimeFigureOut">
               <a:rPr lang="zh-CN" altLang="en-US" smtClean="0"/>
-              <a:t>2023/3/11</a:t>
+              <a:t>2023/3/18</a:t>
             </a:fld>
             <a:endParaRPr lang="zh-CN" altLang="en-US"/>
           </a:p>
@@ -2876,7 +3180,7 @@
           <a:p>
             <a:fld id="{82F288E0-7875-42C4-84C8-98DBBD3BF4D2}" type="datetimeFigureOut">
               <a:rPr lang="zh-CN" altLang="en-US" smtClean="0"/>
-              <a:t>2023/3/11</a:t>
+              <a:t>2023/3/18</a:t>
             </a:fld>
             <a:endParaRPr lang="zh-CN" altLang="en-US"/>
           </a:p>
@@ -2978,7 +3282,7 @@
           <a:p>
             <a:fld id="{82F288E0-7875-42C4-84C8-98DBBD3BF4D2}" type="datetimeFigureOut">
               <a:rPr lang="zh-CN" altLang="en-US" smtClean="0"/>
-              <a:t>2023/3/11</a:t>
+              <a:t>2023/3/18</a:t>
             </a:fld>
             <a:endParaRPr lang="zh-CN" altLang="en-US"/>
           </a:p>
@@ -3237,7 +3541,7 @@
           <a:p>
             <a:fld id="{82F288E0-7875-42C4-84C8-98DBBD3BF4D2}" type="datetimeFigureOut">
               <a:rPr lang="zh-CN" altLang="en-US" smtClean="0"/>
-              <a:t>2023/3/11</a:t>
+              <a:t>2023/3/18</a:t>
             </a:fld>
             <a:endParaRPr lang="zh-CN" altLang="en-US"/>
           </a:p>
@@ -3422,7 +3726,7 @@
           <a:p>
             <a:fld id="{82F288E0-7875-42C4-84C8-98DBBD3BF4D2}" type="datetimeFigureOut">
               <a:rPr lang="zh-CN" altLang="en-US" smtClean="0"/>
-              <a:t>2023/3/11</a:t>
+              <a:t>2023/3/18</a:t>
             </a:fld>
             <a:endParaRPr lang="zh-CN" altLang="en-US"/>
           </a:p>
@@ -3649,7 +3953,7 @@
           <a:p>
             <a:fld id="{82F288E0-7875-42C4-84C8-98DBBD3BF4D2}" type="datetimeFigureOut">
               <a:rPr lang="zh-CN" altLang="en-US" smtClean="0"/>
-              <a:t>2023/3/11</a:t>
+              <a:t>2023/3/18</a:t>
             </a:fld>
             <a:endParaRPr lang="zh-CN" altLang="en-US"/>
           </a:p>
@@ -4781,7 +5085,7 @@
           <a:graphicData uri="http://schemas.openxmlformats.org/presentationml/2006/ole">
             <mc:AlternateContent xmlns:mc="http://schemas.openxmlformats.org/markup-compatibility/2006">
               <mc:Choice xmlns:v="urn:schemas-microsoft-com:vml" Requires="v">
-                <p:oleObj spid="_x0000_s1044" name="Picture" r:id="rId3" imgW="5771520" imgH="4519800" progId="Word.Picture.8">
+                <p:oleObj spid="_x0000_s1050" name="Picture" r:id="rId3" imgW="5771520" imgH="4519800" progId="Word.Picture.8">
                   <p:embed/>
                 </p:oleObj>
               </mc:Choice>
@@ -6560,7 +6864,7 @@
           <p:cNvPr id="2" name="文本框 1">
             <a:extLst>
               <a:ext uri="{FF2B5EF4-FFF2-40B4-BE49-F238E27FC236}">
-                <a16:creationId xmlns="" xmlns:a16="http://schemas.microsoft.com/office/drawing/2014/main" id="{438813D7-676E-4BB1-8BD1-AA790C109740}"/>
+                <a16:creationId xmlns:a16="http://schemas.microsoft.com/office/drawing/2014/main" xmlns="" id="{438813D7-676E-4BB1-8BD1-AA790C109740}"/>
               </a:ext>
             </a:extLst>
           </p:cNvPr>
@@ -6592,21 +6896,7 @@
                 <a:ea typeface="黑体" panose="02010609060101010101" pitchFamily="49" charset="-122"/>
                 <a:cs typeface="Times New Roman" panose="02020603050405020304" pitchFamily="18" charset="0"/>
               </a:rPr>
-              <a:t>思政要素：</a:t>
-            </a:r>
-            <a:r>
-              <a:rPr lang="zh-CN" altLang="en-US" kern="100" dirty="0">
-                <a:ea typeface="黑体" panose="02010609060101010101" pitchFamily="49" charset="-122"/>
-                <a:cs typeface="Times New Roman" panose="02020603050405020304" pitchFamily="18" charset="0"/>
-              </a:rPr>
-              <a:t>学</a:t>
-            </a:r>
-            <a:r>
-              <a:rPr lang="zh-CN" altLang="en-US" kern="100" dirty="0">
-                <a:ea typeface="黑体" panose="02010609060101010101" pitchFamily="49" charset="-122"/>
-                <a:cs typeface="Times New Roman" panose="02020603050405020304" pitchFamily="18" charset="0"/>
-              </a:rPr>
-              <a:t>思结合、知行统一、实事求是）</a:t>
+              <a:t>思政要素：学思结合、知行统一、实事求是）</a:t>
             </a:r>
           </a:p>
         </p:txBody>

--- a/wwwroot/15-FivePlatformsofMVCArchitectureModel.pptx
+++ b/wwwroot/15-FivePlatformsofMVCArchitectureModel.pptx
@@ -931,6 +931,23 @@
           <a:bodyPr/>
           <a:lstStyle/>
           <a:p>
+            <a:pPr marL="0" marR="0" lvl="0" indent="0" algn="l" defTabSz="685800" rtl="0" eaLnBrk="1" fontAlgn="auto" latinLnBrk="0" hangingPunct="1">
+              <a:lnSpc>
+                <a:spcPct val="100000"/>
+              </a:lnSpc>
+              <a:spcBef>
+                <a:spcPts val="0"/>
+              </a:spcBef>
+              <a:spcAft>
+                <a:spcPts val="0"/>
+              </a:spcAft>
+              <a:buClrTx/>
+              <a:buSzTx/>
+              <a:buFontTx/>
+              <a:buNone/>
+              <a:tabLst/>
+              <a:defRPr/>
+            </a:pPr>
             <a:r>
               <a:rPr lang="zh-CN" altLang="en-US" dirty="0" smtClean="0"/>
               <a:t>第</a:t>
@@ -941,7 +958,47 @@
             </a:r>
             <a:r>
               <a:rPr lang="zh-CN" altLang="en-US" dirty="0" smtClean="0"/>
-              <a:t>分钟</a:t>
+              <a:t>分钟。视图</a:t>
+            </a:r>
+            <a:r>
+              <a:rPr lang="en-US" altLang="zh-CN" dirty="0" smtClean="0"/>
+              <a:t>V</a:t>
+            </a:r>
+            <a:r>
+              <a:rPr lang="zh-CN" altLang="en-US" dirty="0" smtClean="0"/>
+              <a:t>：如上。控制</a:t>
+            </a:r>
+            <a:r>
+              <a:rPr lang="en-US" altLang="zh-CN" dirty="0" smtClean="0"/>
+              <a:t>C</a:t>
+            </a:r>
+            <a:r>
+              <a:rPr lang="zh-CN" altLang="en-US" smtClean="0"/>
+              <a:t>：一对多。</a:t>
+            </a:r>
+            <a:r>
+              <a:rPr lang="zh-CN" altLang="en-US" dirty="0" smtClean="0"/>
+              <a:t>模型</a:t>
+            </a:r>
+            <a:r>
+              <a:rPr lang="en-US" altLang="zh-CN" dirty="0" smtClean="0"/>
+              <a:t>M</a:t>
+            </a:r>
+            <a:r>
+              <a:rPr lang="zh-CN" altLang="en-US" dirty="0" smtClean="0"/>
+              <a:t>：实践</a:t>
+            </a:r>
+            <a:r>
+              <a:rPr lang="en-US" dirty="0" smtClean="0"/>
+              <a:t>(</a:t>
+            </a:r>
+            <a:r>
+              <a:rPr lang="zh-CN" altLang="en-US" dirty="0" smtClean="0"/>
+              <a:t>数据读写</a:t>
+            </a:r>
+            <a:r>
+              <a:rPr lang="en-US" dirty="0" smtClean="0"/>
+              <a:t>) </a:t>
             </a:r>
             <a:endParaRPr lang="zh-CN" altLang="en-US" dirty="0"/>
           </a:p>
@@ -1696,10 +1753,10 @@
               <a:t>数据读写</a:t>
             </a:r>
             <a:r>
-              <a:rPr lang="en-US" smtClean="0"/>
+              <a:rPr lang="en-US" dirty="0" smtClean="0"/>
               <a:t>) </a:t>
             </a:r>
-            <a:endParaRPr lang="zh-CN" altLang="en-US" smtClean="0"/>
+            <a:endParaRPr lang="zh-CN" altLang="en-US" dirty="0" smtClean="0"/>
           </a:p>
         </p:txBody>
       </p:sp>
@@ -5085,7 +5142,7 @@
           <a:graphicData uri="http://schemas.openxmlformats.org/presentationml/2006/ole">
             <mc:AlternateContent xmlns:mc="http://schemas.openxmlformats.org/markup-compatibility/2006">
               <mc:Choice xmlns:v="urn:schemas-microsoft-com:vml" Requires="v">
-                <p:oleObj spid="_x0000_s1050" name="Picture" r:id="rId3" imgW="5771520" imgH="4519800" progId="Word.Picture.8">
+                <p:oleObj spid="_x0000_s1051" name="Picture" r:id="rId3" imgW="5771520" imgH="4519800" progId="Word.Picture.8">
                   <p:embed/>
                 </p:oleObj>
               </mc:Choice>
@@ -6864,7 +6921,7 @@
           <p:cNvPr id="2" name="文本框 1">
             <a:extLst>
               <a:ext uri="{FF2B5EF4-FFF2-40B4-BE49-F238E27FC236}">
-                <a16:creationId xmlns:a16="http://schemas.microsoft.com/office/drawing/2014/main" xmlns="" id="{438813D7-676E-4BB1-8BD1-AA790C109740}"/>
+                <a16:creationId xmlns="" xmlns:a16="http://schemas.microsoft.com/office/drawing/2014/main" id="{438813D7-676E-4BB1-8BD1-AA790C109740}"/>
               </a:ext>
             </a:extLst>
           </p:cNvPr>
